--- a/template/One_Pager_Template_v2.pptx
+++ b/template/One_Pager_Template_v2.pptx
@@ -116,7 +116,7 @@
 <file path=ppt/revisionInfo.xml><?xml version="1.0" encoding="utf-8"?>
 <p1510:revInfo xmlns:a="http://schemas.openxmlformats.org/drawingml/2006/main" xmlns:r="http://schemas.openxmlformats.org/officeDocument/2006/relationships" xmlns:p1510="http://schemas.microsoft.com/office/powerpoint/2015/10/main">
   <p1510:revLst>
-    <p1510:client id="{4C05FE9E-0CAC-3647-ADCA-327D300A8D0E}" v="30" dt="2026-01-11T18:55:06.467"/>
+    <p1510:client id="{18C37F0A-E06B-EA42-BCE2-419FD1496035}" v="1" dt="2026-03-27T05:41:06.772"/>
   </p1510:revLst>
 </p1510:revInfo>
 </file>
@@ -144,14 +144,6 @@
             <ac:picMk id="2" creationId="{1B8C8100-8DA7-3F49-FA39-9BED856CBFE8}"/>
           </ac:picMkLst>
         </pc:picChg>
-        <pc:picChg chg="add del mod topLvl">
-          <ac:chgData name="Yang Chen" userId="5efd7b53-582d-4367-abd9-b7e0599e7d94" providerId="ADAL" clId="{4C05FE9E-0CAC-3647-ADCA-327D300A8D0E}" dt="2026-01-11T18:16:34.473" v="128" actId="478"/>
-          <ac:picMkLst>
-            <pc:docMk/>
-            <pc:sldMk cId="1762505184" sldId="257"/>
-            <ac:picMk id="12" creationId="{66EFD50C-3371-8C2C-6366-EAEDF4AAC467}"/>
-          </ac:picMkLst>
-        </pc:picChg>
       </pc:sldChg>
       <pc:sldChg chg="addSp delSp modSp mod setBg">
         <pc:chgData name="Yang Chen" userId="5efd7b53-582d-4367-abd9-b7e0599e7d94" providerId="ADAL" clId="{4C05FE9E-0CAC-3647-ADCA-327D300A8D0E}" dt="2026-01-11T18:56:18.679" v="163" actId="1036"/>
@@ -165,14 +157,6 @@
             <pc:docMk/>
             <pc:sldMk cId="0" sldId="324"/>
             <ac:spMk id="2" creationId="{8C35FF63-1147-29CD-E22D-A7C4685B915A}"/>
-          </ac:spMkLst>
-        </pc:spChg>
-        <pc:spChg chg="add mod">
-          <ac:chgData name="Yang Chen" userId="5efd7b53-582d-4367-abd9-b7e0599e7d94" providerId="ADAL" clId="{4C05FE9E-0CAC-3647-ADCA-327D300A8D0E}" dt="2026-01-11T18:07:48.766" v="54"/>
-          <ac:spMkLst>
-            <pc:docMk/>
-            <pc:sldMk cId="0" sldId="324"/>
-            <ac:spMk id="3" creationId="{34F7540C-50E0-802B-BD6F-7F93D09436B7}"/>
           </ac:spMkLst>
         </pc:spChg>
         <pc:spChg chg="add mod">
@@ -305,6 +289,38 @@
       </pc:sldMasterChg>
     </pc:docChg>
   </pc:docChgLst>
+  <pc:docChgLst>
+    <pc:chgData name="Yang Chen" userId="5efd7b53-582d-4367-abd9-b7e0599e7d94" providerId="ADAL" clId="{18C37F0A-E06B-EA42-BCE2-419FD1496035}"/>
+    <pc:docChg chg="custSel modSld">
+      <pc:chgData name="Yang Chen" userId="5efd7b53-582d-4367-abd9-b7e0599e7d94" providerId="ADAL" clId="{18C37F0A-E06B-EA42-BCE2-419FD1496035}" dt="2026-03-27T05:41:06.771" v="4"/>
+      <pc:docMkLst>
+        <pc:docMk/>
+      </pc:docMkLst>
+      <pc:sldChg chg="addSp delSp modSp mod">
+        <pc:chgData name="Yang Chen" userId="5efd7b53-582d-4367-abd9-b7e0599e7d94" providerId="ADAL" clId="{18C37F0A-E06B-EA42-BCE2-419FD1496035}" dt="2026-03-27T05:41:06.771" v="4"/>
+        <pc:sldMkLst>
+          <pc:docMk/>
+          <pc:sldMk cId="1762505184" sldId="257"/>
+        </pc:sldMkLst>
+        <pc:picChg chg="del mod">
+          <ac:chgData name="Yang Chen" userId="5efd7b53-582d-4367-abd9-b7e0599e7d94" providerId="ADAL" clId="{18C37F0A-E06B-EA42-BCE2-419FD1496035}" dt="2026-03-27T05:40:58.326" v="3" actId="478"/>
+          <ac:picMkLst>
+            <pc:docMk/>
+            <pc:sldMk cId="1762505184" sldId="257"/>
+            <ac:picMk id="2" creationId="{1B8C8100-8DA7-3F49-FA39-9BED856CBFE8}"/>
+          </ac:picMkLst>
+        </pc:picChg>
+        <pc:picChg chg="add mod">
+          <ac:chgData name="Yang Chen" userId="5efd7b53-582d-4367-abd9-b7e0599e7d94" providerId="ADAL" clId="{18C37F0A-E06B-EA42-BCE2-419FD1496035}" dt="2026-03-27T05:41:06.771" v="4"/>
+          <ac:picMkLst>
+            <pc:docMk/>
+            <pc:sldMk cId="1762505184" sldId="257"/>
+            <ac:picMk id="4" creationId="{DE800AD8-FBC9-B598-5608-BB01FD75D913}"/>
+          </ac:picMkLst>
+        </pc:picChg>
+      </pc:sldChg>
+    </pc:docChg>
+  </pc:docChgLst>
 </pc:chgInfo>
 </file>
 
@@ -439,7 +455,7 @@
           <a:p>
             <a:fld id="{AC9CE0DB-C912-874B-9D1B-952EB1E268DD}" type="datetimeFigureOut">
               <a:rPr kumimoji="1" lang="zh-TW" altLang="en-US" smtClean="0"/>
-              <a:t>2026/1/11</a:t>
+              <a:t>2026/3/26</a:t>
             </a:fld>
             <a:endParaRPr kumimoji="1" lang="zh-TW" altLang="en-US"/>
           </a:p>
@@ -609,7 +625,7 @@
           <a:p>
             <a:fld id="{AC9CE0DB-C912-874B-9D1B-952EB1E268DD}" type="datetimeFigureOut">
               <a:rPr kumimoji="1" lang="zh-TW" altLang="en-US" smtClean="0"/>
-              <a:t>2026/1/11</a:t>
+              <a:t>2026/3/26</a:t>
             </a:fld>
             <a:endParaRPr kumimoji="1" lang="zh-TW" altLang="en-US"/>
           </a:p>
@@ -789,7 +805,7 @@
           <a:p>
             <a:fld id="{AC9CE0DB-C912-874B-9D1B-952EB1E268DD}" type="datetimeFigureOut">
               <a:rPr kumimoji="1" lang="zh-TW" altLang="en-US" smtClean="0"/>
-              <a:t>2026/1/11</a:t>
+              <a:t>2026/3/26</a:t>
             </a:fld>
             <a:endParaRPr kumimoji="1" lang="zh-TW" altLang="en-US"/>
           </a:p>
@@ -959,7 +975,7 @@
           <a:p>
             <a:fld id="{AC9CE0DB-C912-874B-9D1B-952EB1E268DD}" type="datetimeFigureOut">
               <a:rPr kumimoji="1" lang="zh-TW" altLang="en-US" smtClean="0"/>
-              <a:t>2026/1/11</a:t>
+              <a:t>2026/3/26</a:t>
             </a:fld>
             <a:endParaRPr kumimoji="1" lang="zh-TW" altLang="en-US"/>
           </a:p>
@@ -1203,7 +1219,7 @@
           <a:p>
             <a:fld id="{AC9CE0DB-C912-874B-9D1B-952EB1E268DD}" type="datetimeFigureOut">
               <a:rPr kumimoji="1" lang="zh-TW" altLang="en-US" smtClean="0"/>
-              <a:t>2026/1/11</a:t>
+              <a:t>2026/3/26</a:t>
             </a:fld>
             <a:endParaRPr kumimoji="1" lang="zh-TW" altLang="en-US"/>
           </a:p>
@@ -1435,7 +1451,7 @@
           <a:p>
             <a:fld id="{AC9CE0DB-C912-874B-9D1B-952EB1E268DD}" type="datetimeFigureOut">
               <a:rPr kumimoji="1" lang="zh-TW" altLang="en-US" smtClean="0"/>
-              <a:t>2026/1/11</a:t>
+              <a:t>2026/3/26</a:t>
             </a:fld>
             <a:endParaRPr kumimoji="1" lang="zh-TW" altLang="en-US"/>
           </a:p>
@@ -1802,7 +1818,7 @@
           <a:p>
             <a:fld id="{AC9CE0DB-C912-874B-9D1B-952EB1E268DD}" type="datetimeFigureOut">
               <a:rPr kumimoji="1" lang="zh-TW" altLang="en-US" smtClean="0"/>
-              <a:t>2026/1/11</a:t>
+              <a:t>2026/3/26</a:t>
             </a:fld>
             <a:endParaRPr kumimoji="1" lang="zh-TW" altLang="en-US"/>
           </a:p>
@@ -1920,7 +1936,7 @@
           <a:p>
             <a:fld id="{AC9CE0DB-C912-874B-9D1B-952EB1E268DD}" type="datetimeFigureOut">
               <a:rPr kumimoji="1" lang="zh-TW" altLang="en-US" smtClean="0"/>
-              <a:t>2026/1/11</a:t>
+              <a:t>2026/3/26</a:t>
             </a:fld>
             <a:endParaRPr kumimoji="1" lang="zh-TW" altLang="en-US"/>
           </a:p>
@@ -2015,7 +2031,7 @@
           <a:p>
             <a:fld id="{AC9CE0DB-C912-874B-9D1B-952EB1E268DD}" type="datetimeFigureOut">
               <a:rPr kumimoji="1" lang="zh-TW" altLang="en-US" smtClean="0"/>
-              <a:t>2026/1/11</a:t>
+              <a:t>2026/3/26</a:t>
             </a:fld>
             <a:endParaRPr kumimoji="1" lang="zh-TW" altLang="en-US"/>
           </a:p>
@@ -2292,7 +2308,7 @@
           <a:p>
             <a:fld id="{AC9CE0DB-C912-874B-9D1B-952EB1E268DD}" type="datetimeFigureOut">
               <a:rPr kumimoji="1" lang="zh-TW" altLang="en-US" smtClean="0"/>
-              <a:t>2026/1/11</a:t>
+              <a:t>2026/3/26</a:t>
             </a:fld>
             <a:endParaRPr kumimoji="1" lang="zh-TW" altLang="en-US"/>
           </a:p>
@@ -2549,7 +2565,7 @@
           <a:p>
             <a:fld id="{AC9CE0DB-C912-874B-9D1B-952EB1E268DD}" type="datetimeFigureOut">
               <a:rPr kumimoji="1" lang="zh-TW" altLang="en-US" smtClean="0"/>
-              <a:t>2026/1/11</a:t>
+              <a:t>2026/3/26</a:t>
             </a:fld>
             <a:endParaRPr kumimoji="1" lang="zh-TW" altLang="en-US"/>
           </a:p>
@@ -2771,7 +2787,7 @@
           <a:p>
             <a:fld id="{AC9CE0DB-C912-874B-9D1B-952EB1E268DD}" type="datetimeFigureOut">
               <a:rPr kumimoji="1" lang="zh-TW" altLang="en-US" smtClean="0"/>
-              <a:t>2026/1/11</a:t>
+              <a:t>2026/3/26</a:t>
             </a:fld>
             <a:endParaRPr kumimoji="1" lang="zh-TW" altLang="en-US"/>
           </a:p>
@@ -3680,10 +3696,10 @@
       </p:grpSpPr>
       <p:pic>
         <p:nvPicPr>
-          <p:cNvPr id="2" name="Picture 1">
+          <p:cNvPr id="4" name="Picture 3">
             <a:extLst>
               <a:ext uri="{FF2B5EF4-FFF2-40B4-BE49-F238E27FC236}">
-                <a16:creationId xmlns:a16="http://schemas.microsoft.com/office/drawing/2014/main" id="{1B8C8100-8DA7-3F49-FA39-9BED856CBFE8}"/>
+                <a16:creationId xmlns:a16="http://schemas.microsoft.com/office/drawing/2014/main" id="{DE800AD8-FBC9-B598-5608-BB01FD75D913}"/>
               </a:ext>
             </a:extLst>
           </p:cNvPr>
@@ -3700,8 +3716,8 @@
         </p:blipFill>
         <p:spPr>
           <a:xfrm>
-            <a:off x="0" y="-38995"/>
-            <a:ext cx="7822086" cy="10136390"/>
+            <a:off x="0" y="0"/>
+            <a:ext cx="7772400" cy="10058400"/>
           </a:xfrm>
           <a:prstGeom prst="rect">
             <a:avLst/>
